--- a/examples/fixtures/template_master_heavy.pptx
+++ b/examples/fixtures/template_master_heavy.pptx
@@ -3090,7 +3090,93 @@
       <p:grpSpPr/>
       <p:sp>
         <p:nvSpPr>
-          <p:cNvPr id="2" name="TextBox 1"/>
+          <p:cNvPr id="2" name="Rectangle 1"/>
+          <p:cNvSpPr/>
+          <p:nvPr/>
+        </p:nvSpPr>
+        <p:spPr>
+          <a:xfrm>
+            <a:off x="0" y="0"/>
+            <a:ext cx="12191695" cy="365760"/>
+          </a:xfrm>
+          <a:prstGeom prst="rect">
+            <a:avLst/>
+          </a:prstGeom>
+          <a:solidFill>
+            <a:srgbClr val="1E3C78"/>
+          </a:solidFill>
+          <a:ln>
+            <a:noFill/>
+          </a:ln>
+        </p:spPr>
+        <p:style>
+          <a:lnRef idx="1">
+            <a:schemeClr val="accent1"/>
+          </a:lnRef>
+          <a:fillRef idx="3">
+            <a:schemeClr val="accent1"/>
+          </a:fillRef>
+          <a:effectRef idx="2">
+            <a:schemeClr val="accent1"/>
+          </a:effectRef>
+          <a:fontRef idx="minor">
+            <a:schemeClr val="lt1"/>
+          </a:fontRef>
+        </p:style>
+        <p:txBody>
+          <a:bodyPr rtlCol="0" anchor="ctr"/>
+          <a:lstStyle/>
+          <a:p>
+            <a:pPr algn="ctr"/>
+          </a:p>
+        </p:txBody>
+      </p:sp>
+      <p:sp>
+        <p:nvSpPr>
+          <p:cNvPr id="3" name="Rectangle 2"/>
+          <p:cNvSpPr/>
+          <p:nvPr/>
+        </p:nvSpPr>
+        <p:spPr>
+          <a:xfrm>
+            <a:off x="1828800" y="1645920"/>
+            <a:ext cx="8534095" cy="3566160"/>
+          </a:xfrm>
+          <a:prstGeom prst="rect">
+            <a:avLst/>
+          </a:prstGeom>
+          <a:solidFill>
+            <a:srgbClr val="FFFFFF"/>
+          </a:solidFill>
+          <a:ln>
+            <a:noFill/>
+          </a:ln>
+        </p:spPr>
+        <p:style>
+          <a:lnRef idx="1">
+            <a:schemeClr val="accent1"/>
+          </a:lnRef>
+          <a:fillRef idx="3">
+            <a:schemeClr val="accent1"/>
+          </a:fillRef>
+          <a:effectRef idx="2">
+            <a:schemeClr val="accent1"/>
+          </a:effectRef>
+          <a:fontRef idx="minor">
+            <a:schemeClr val="lt1"/>
+          </a:fontRef>
+        </p:style>
+        <p:txBody>
+          <a:bodyPr rtlCol="0" anchor="ctr"/>
+          <a:lstStyle/>
+          <a:p>
+            <a:pPr algn="ctr"/>
+          </a:p>
+        </p:txBody>
+      </p:sp>
+      <p:sp>
+        <p:nvSpPr>
+          <p:cNvPr id="4" name="TextBox 3"/>
           <p:cNvSpPr txBox="1"/>
           <p:nvPr/>
         </p:nvSpPr>
@@ -3111,7 +3197,7 @@
           <a:lstStyle/>
           <a:p>
             <a:r>
-              <a:t>Master-heavy layouts: out of scope for template v1</a:t>
+              <a:t>Master band fixture (layout/master decorations P1)</a:t>
             </a:r>
           </a:p>
         </p:txBody>
